--- a/Lectures/Slides/L3.pptx
+++ b/Lectures/Slides/L3.pptx
@@ -272,7 +272,7 @@
       <p15:sldGuideLst xmlns:p15="http://schemas.microsoft.com/office/powerpoint/2012/main"/>
     </p:ext>
     <p:ext uri="http://customooxmlschemas.google.com/">
-      <go:slidesCustomData xmlns:go="http://customooxmlschemas.google.com/" xmlns:ahyp="http://schemas.microsoft.com/office/drawing/2018/hyperlinkcolor" xmlns:p15="http://schemas.microsoft.com/office/powerpoint/2012/main" xmlns:p14="http://schemas.microsoft.com/office/powerpoint/2010/main" xmlns:com="http://schemas.openxmlformats.org/drawingml/2006/compatibility" xmlns:pvml="urn:schemas-microsoft-com:office:powerpoint" xmlns:v="urn:schemas-microsoft-com:vml" xmlns:o="urn:schemas-microsoft-com:office:office" xmlns:dgm="http://schemas.openxmlformats.org/drawingml/2006/diagram" xmlns:c="http://schemas.openxmlformats.org/drawingml/2006/chart" xmlns:mv="urn:schemas-microsoft-com:mac:vml" xmlns:mc="http://schemas.openxmlformats.org/markup-compatibility/2006" xmlns="" r:id="rId31" roundtripDataSignature="AMtx7mjKkk5wOoQj6sDPPETbbKgHU96Dzg=="/>
+      <go:slidesCustomData xmlns="" xmlns:mc="http://schemas.openxmlformats.org/markup-compatibility/2006" xmlns:mv="urn:schemas-microsoft-com:mac:vml" xmlns:c="http://schemas.openxmlformats.org/drawingml/2006/chart" xmlns:dgm="http://schemas.openxmlformats.org/drawingml/2006/diagram" xmlns:o="urn:schemas-microsoft-com:office:office" xmlns:v="urn:schemas-microsoft-com:vml" xmlns:pvml="urn:schemas-microsoft-com:office:powerpoint" xmlns:com="http://schemas.openxmlformats.org/drawingml/2006/compatibility" xmlns:p14="http://schemas.microsoft.com/office/powerpoint/2010/main" xmlns:p15="http://schemas.microsoft.com/office/powerpoint/2012/main" xmlns:ahyp="http://schemas.microsoft.com/office/drawing/2018/hyperlinkcolor" xmlns:go="http://customooxmlschemas.google.com/" r:id="rId31" roundtripDataSignature="AMtx7mjKkk5wOoQj6sDPPETbbKgHU96Dzg=="/>
     </p:ext>
   </p:extLst>
 </p:presentation>
@@ -19853,6 +19853,48 @@
           </a:prstGeom>
         </p:spPr>
       </p:pic>
+      <p:sp>
+        <p:nvSpPr>
+          <p:cNvPr id="2" name="TextBox 1">
+            <a:extLst>
+              <a:ext uri="{FF2B5EF4-FFF2-40B4-BE49-F238E27FC236}">
+                <a16:creationId xmlns:a16="http://schemas.microsoft.com/office/drawing/2014/main" id="{19664ED5-595E-3924-B86B-CE29C9427CF4}"/>
+              </a:ext>
+            </a:extLst>
+          </p:cNvPr>
+          <p:cNvSpPr txBox="1"/>
+          <p:nvPr/>
+        </p:nvSpPr>
+        <p:spPr>
+          <a:xfrm>
+            <a:off x="7618314" y="6129007"/>
+            <a:ext cx="2919935" cy="261610"/>
+          </a:xfrm>
+          <a:prstGeom prst="rect">
+            <a:avLst/>
+          </a:prstGeom>
+          <a:noFill/>
+        </p:spPr>
+        <p:txBody>
+          <a:bodyPr wrap="square" rtlCol="0">
+            <a:spAutoFit/>
+          </a:bodyPr>
+          <a:lstStyle/>
+          <a:p>
+            <a:pPr algn="ctr"/>
+            <a:r>
+              <a:rPr lang="en-US" sz="1100" dirty="0">
+                <a:hlinkClick r:id="rId6"/>
+              </a:rPr>
+              <a:t>https://en.wikipedia.org/wiki/Pull-up_resistor</a:t>
+            </a:r>
+            <a:r>
+              <a:rPr lang="en-US" sz="1100" dirty="0"/>
+              <a:t> </a:t>
+            </a:r>
+          </a:p>
+        </p:txBody>
+      </p:sp>
     </p:spTree>
     <p:extLst>
       <p:ext uri="{BB962C8B-B14F-4D97-AF65-F5344CB8AC3E}">
@@ -22224,6 +22266,48 @@
           </a:p>
         </p:txBody>
       </p:sp>
+      <p:sp>
+        <p:nvSpPr>
+          <p:cNvPr id="7" name="TextBox 6">
+            <a:extLst>
+              <a:ext uri="{FF2B5EF4-FFF2-40B4-BE49-F238E27FC236}">
+                <a16:creationId xmlns:a16="http://schemas.microsoft.com/office/drawing/2014/main" id="{EC8DCEE7-ACAA-9CE3-77E1-899749D40C42}"/>
+              </a:ext>
+            </a:extLst>
+          </p:cNvPr>
+          <p:cNvSpPr txBox="1"/>
+          <p:nvPr/>
+        </p:nvSpPr>
+        <p:spPr>
+          <a:xfrm>
+            <a:off x="6989985" y="6163817"/>
+            <a:ext cx="3793067" cy="261610"/>
+          </a:xfrm>
+          <a:prstGeom prst="rect">
+            <a:avLst/>
+          </a:prstGeom>
+          <a:noFill/>
+        </p:spPr>
+        <p:txBody>
+          <a:bodyPr wrap="square" rtlCol="0">
+            <a:spAutoFit/>
+          </a:bodyPr>
+          <a:lstStyle/>
+          <a:p>
+            <a:pPr algn="ctr"/>
+            <a:r>
+              <a:rPr lang="en-US" sz="1100" dirty="0">
+                <a:hlinkClick r:id="rId6"/>
+              </a:rPr>
+              <a:t>https://en.wikipedia.org/wiki/Push%E2%80%93pull_output</a:t>
+            </a:r>
+            <a:r>
+              <a:rPr lang="en-US" sz="1100" dirty="0"/>
+              <a:t> </a:t>
+            </a:r>
+          </a:p>
+        </p:txBody>
+      </p:sp>
     </p:spTree>
     <p:extLst>
       <p:ext uri="{BB962C8B-B14F-4D97-AF65-F5344CB8AC3E}">
@@ -23074,6 +23158,48 @@
           </a:p>
         </p:txBody>
       </p:sp>
+      <p:sp>
+        <p:nvSpPr>
+          <p:cNvPr id="7" name="TextBox 6">
+            <a:extLst>
+              <a:ext uri="{FF2B5EF4-FFF2-40B4-BE49-F238E27FC236}">
+                <a16:creationId xmlns:a16="http://schemas.microsoft.com/office/drawing/2014/main" id="{B9F8F7C3-BEA9-720E-727F-6C73B5A6D30C}"/>
+              </a:ext>
+            </a:extLst>
+          </p:cNvPr>
+          <p:cNvSpPr txBox="1"/>
+          <p:nvPr/>
+        </p:nvSpPr>
+        <p:spPr>
+          <a:xfrm>
+            <a:off x="6989985" y="6163817"/>
+            <a:ext cx="3793067" cy="261610"/>
+          </a:xfrm>
+          <a:prstGeom prst="rect">
+            <a:avLst/>
+          </a:prstGeom>
+          <a:noFill/>
+        </p:spPr>
+        <p:txBody>
+          <a:bodyPr wrap="square" rtlCol="0">
+            <a:spAutoFit/>
+          </a:bodyPr>
+          <a:lstStyle/>
+          <a:p>
+            <a:pPr algn="ctr"/>
+            <a:r>
+              <a:rPr lang="en-US" sz="1100" dirty="0">
+                <a:hlinkClick r:id="rId5"/>
+              </a:rPr>
+              <a:t>https://en.wikipedia.org/wiki/Push%E2%80%93pull_output</a:t>
+            </a:r>
+            <a:r>
+              <a:rPr lang="en-US" sz="1100" dirty="0"/>
+              <a:t> </a:t>
+            </a:r>
+          </a:p>
+        </p:txBody>
+      </p:sp>
     </p:spTree>
     <p:extLst>
       <p:ext uri="{BB962C8B-B14F-4D97-AF65-F5344CB8AC3E}">
@@ -24730,6 +24856,48 @@
           </a:prstGeom>
         </p:spPr>
       </p:pic>
+      <p:sp>
+        <p:nvSpPr>
+          <p:cNvPr id="2" name="TextBox 1">
+            <a:extLst>
+              <a:ext uri="{FF2B5EF4-FFF2-40B4-BE49-F238E27FC236}">
+                <a16:creationId xmlns:a16="http://schemas.microsoft.com/office/drawing/2014/main" id="{CF5CA09D-5225-499B-AF46-7829BC91E492}"/>
+              </a:ext>
+            </a:extLst>
+          </p:cNvPr>
+          <p:cNvSpPr txBox="1"/>
+          <p:nvPr/>
+        </p:nvSpPr>
+        <p:spPr>
+          <a:xfrm>
+            <a:off x="7618314" y="6129007"/>
+            <a:ext cx="2919935" cy="261610"/>
+          </a:xfrm>
+          <a:prstGeom prst="rect">
+            <a:avLst/>
+          </a:prstGeom>
+          <a:noFill/>
+        </p:spPr>
+        <p:txBody>
+          <a:bodyPr wrap="square" rtlCol="0">
+            <a:spAutoFit/>
+          </a:bodyPr>
+          <a:lstStyle/>
+          <a:p>
+            <a:pPr algn="ctr"/>
+            <a:r>
+              <a:rPr lang="en-US" sz="1100" dirty="0">
+                <a:hlinkClick r:id="rId6"/>
+              </a:rPr>
+              <a:t>https://en.wikipedia.org/wiki/Pull-up_resistor</a:t>
+            </a:r>
+            <a:r>
+              <a:rPr lang="en-US" sz="1100" dirty="0"/>
+              <a:t> </a:t>
+            </a:r>
+          </a:p>
+        </p:txBody>
+      </p:sp>
     </p:spTree>
     <p:extLst>
       <p:ext uri="{BB962C8B-B14F-4D97-AF65-F5344CB8AC3E}">
@@ -26657,6 +26825,48 @@
           </a:extLst>
         </p:spPr>
       </p:pic>
+      <p:sp>
+        <p:nvSpPr>
+          <p:cNvPr id="2" name="TextBox 1">
+            <a:extLst>
+              <a:ext uri="{FF2B5EF4-FFF2-40B4-BE49-F238E27FC236}">
+                <a16:creationId xmlns:a16="http://schemas.microsoft.com/office/drawing/2014/main" id="{AD27E0E8-4AC2-BB24-ED52-D29FA2FDF093}"/>
+              </a:ext>
+            </a:extLst>
+          </p:cNvPr>
+          <p:cNvSpPr txBox="1"/>
+          <p:nvPr/>
+        </p:nvSpPr>
+        <p:spPr>
+          <a:xfrm>
+            <a:off x="4517796" y="6292303"/>
+            <a:ext cx="2628053" cy="261610"/>
+          </a:xfrm>
+          <a:prstGeom prst="rect">
+            <a:avLst/>
+          </a:prstGeom>
+          <a:noFill/>
+        </p:spPr>
+        <p:txBody>
+          <a:bodyPr wrap="square" rtlCol="0">
+            <a:spAutoFit/>
+          </a:bodyPr>
+          <a:lstStyle/>
+          <a:p>
+            <a:pPr algn="ctr"/>
+            <a:r>
+              <a:rPr lang="en-US" sz="1100" dirty="0">
+                <a:hlinkClick r:id="rId6"/>
+              </a:rPr>
+              <a:t>https://en.wikipedia.org/wiki/Multiplexer</a:t>
+            </a:r>
+            <a:r>
+              <a:rPr lang="en-US" sz="1100" dirty="0"/>
+              <a:t> </a:t>
+            </a:r>
+          </a:p>
+        </p:txBody>
+      </p:sp>
     </p:spTree>
     <p:extLst>
       <p:ext uri="{BB962C8B-B14F-4D97-AF65-F5344CB8AC3E}">
@@ -38429,6 +38639,48 @@
           </a:prstGeom>
         </p:spPr>
       </p:pic>
+      <p:sp>
+        <p:nvSpPr>
+          <p:cNvPr id="2" name="TextBox 1">
+            <a:extLst>
+              <a:ext uri="{FF2B5EF4-FFF2-40B4-BE49-F238E27FC236}">
+                <a16:creationId xmlns:a16="http://schemas.microsoft.com/office/drawing/2014/main" id="{3EDEE608-C306-916C-5818-F9684434C359}"/>
+              </a:ext>
+            </a:extLst>
+          </p:cNvPr>
+          <p:cNvSpPr txBox="1"/>
+          <p:nvPr/>
+        </p:nvSpPr>
+        <p:spPr>
+          <a:xfrm>
+            <a:off x="3962383" y="6375150"/>
+            <a:ext cx="3738880" cy="261610"/>
+          </a:xfrm>
+          <a:prstGeom prst="rect">
+            <a:avLst/>
+          </a:prstGeom>
+          <a:noFill/>
+        </p:spPr>
+        <p:txBody>
+          <a:bodyPr wrap="square" rtlCol="0">
+            <a:spAutoFit/>
+          </a:bodyPr>
+          <a:lstStyle/>
+          <a:p>
+            <a:pPr algn="ctr"/>
+            <a:r>
+              <a:rPr lang="en-US" sz="1100" dirty="0">
+                <a:hlinkClick r:id="rId6"/>
+              </a:rPr>
+              <a:t>https://youtu.be/606DHE81HZ4?si=4FCUMsPSI-xp2QcO</a:t>
+            </a:r>
+            <a:r>
+              <a:rPr lang="en-US" sz="1100" dirty="0"/>
+              <a:t> </a:t>
+            </a:r>
+          </a:p>
+        </p:txBody>
+      </p:sp>
     </p:spTree>
     <p:extLst>
       <p:ext uri="{BB962C8B-B14F-4D97-AF65-F5344CB8AC3E}">
